--- a/Prezintaciya.pptx
+++ b/Prezintaciya.pptx
@@ -268,7 +268,7 @@
           <a:p>
             <a:fld id="{F4B3481F-6E72-4171-A9C8-98D56C39F96E}" type="datetimeFigureOut">
               <a:rPr lang="ru-RU" smtClean="0"/>
-              <a:t>29.05.2026</a:t>
+              <a:t>03.06.2026</a:t>
             </a:fld>
             <a:endParaRPr lang="ru-RU"/>
           </a:p>
@@ -446,7 +446,7 @@
             <a:fld id="{894E9510-8D81-4F7D-A3DD-ECD88FF9FF52}" type="datetimeFigureOut">
               <a:rPr lang="ru-RU" smtClean="0"/>
               <a:pPr/>
-              <a:t>29.05.2026</a:t>
+              <a:t>03.06.2026</a:t>
             </a:fld>
             <a:endParaRPr lang="ru-RU"/>
           </a:p>
@@ -1435,7 +1435,7 @@
             <a:fld id="{2B9B0CA2-EE7C-4F21-BC99-1B7BC45BB5BA}" type="datetimeFigureOut">
               <a:rPr lang="ru-RU" smtClean="0"/>
               <a:pPr/>
-              <a:t>29.05.2026</a:t>
+              <a:t>03.06.2026</a:t>
             </a:fld>
             <a:endParaRPr lang="ru-RU"/>
           </a:p>
@@ -1801,7 +1801,7 @@
             <a:fld id="{2B9B0CA2-EE7C-4F21-BC99-1B7BC45BB5BA}" type="datetimeFigureOut">
               <a:rPr lang="ru-RU" smtClean="0"/>
               <a:pPr/>
-              <a:t>29.05.2026</a:t>
+              <a:t>03.06.2026</a:t>
             </a:fld>
             <a:endParaRPr lang="ru-RU"/>
           </a:p>
@@ -1920,7 +1920,7 @@
             <a:fld id="{2B9B0CA2-EE7C-4F21-BC99-1B7BC45BB5BA}" type="datetimeFigureOut">
               <a:rPr lang="ru-RU" smtClean="0"/>
               <a:pPr/>
-              <a:t>29.05.2026</a:t>
+              <a:t>03.06.2026</a:t>
             </a:fld>
             <a:endParaRPr lang="ru-RU"/>
           </a:p>
@@ -2197,7 +2197,7 @@
             <a:fld id="{2B9B0CA2-EE7C-4F21-BC99-1B7BC45BB5BA}" type="datetimeFigureOut">
               <a:rPr lang="ru-RU" smtClean="0"/>
               <a:pPr/>
-              <a:t>29.05.2026</a:t>
+              <a:t>03.06.2026</a:t>
             </a:fld>
             <a:endParaRPr lang="ru-RU"/>
           </a:p>
@@ -2454,7 +2454,7 @@
             <a:fld id="{2B9B0CA2-EE7C-4F21-BC99-1B7BC45BB5BA}" type="datetimeFigureOut">
               <a:rPr lang="ru-RU" smtClean="0"/>
               <a:pPr/>
-              <a:t>29.05.2026</a:t>
+              <a:t>03.06.2026</a:t>
             </a:fld>
             <a:endParaRPr lang="ru-RU"/>
           </a:p>
@@ -2624,7 +2624,7 @@
             <a:fld id="{2B9B0CA2-EE7C-4F21-BC99-1B7BC45BB5BA}" type="datetimeFigureOut">
               <a:rPr lang="ru-RU" smtClean="0"/>
               <a:pPr/>
-              <a:t>29.05.2026</a:t>
+              <a:t>03.06.2026</a:t>
             </a:fld>
             <a:endParaRPr lang="ru-RU"/>
           </a:p>
@@ -2804,7 +2804,7 @@
             <a:fld id="{2B9B0CA2-EE7C-4F21-BC99-1B7BC45BB5BA}" type="datetimeFigureOut">
               <a:rPr lang="ru-RU" smtClean="0"/>
               <a:pPr/>
-              <a:t>29.05.2026</a:t>
+              <a:t>03.06.2026</a:t>
             </a:fld>
             <a:endParaRPr lang="ru-RU"/>
           </a:p>
@@ -5943,7 +5943,7 @@
             <a:fld id="{2B9B0CA2-EE7C-4F21-BC99-1B7BC45BB5BA}" type="datetimeFigureOut">
               <a:rPr lang="ru-RU" smtClean="0"/>
               <a:pPr/>
-              <a:t>29.05.2026</a:t>
+              <a:t>03.06.2026</a:t>
             </a:fld>
             <a:endParaRPr lang="ru-RU"/>
           </a:p>
@@ -6113,7 +6113,7 @@
             <a:fld id="{2B9B0CA2-EE7C-4F21-BC99-1B7BC45BB5BA}" type="datetimeFigureOut">
               <a:rPr lang="ru-RU" smtClean="0"/>
               <a:pPr/>
-              <a:t>29.05.2026</a:t>
+              <a:t>03.06.2026</a:t>
             </a:fld>
             <a:endParaRPr lang="ru-RU"/>
           </a:p>
@@ -6424,7 +6424,7 @@
             <a:fld id="{2B9B0CA2-EE7C-4F21-BC99-1B7BC45BB5BA}" type="datetimeFigureOut">
               <a:rPr lang="ru-RU" smtClean="0"/>
               <a:pPr/>
-              <a:t>29.05.2026</a:t>
+              <a:t>03.06.2026</a:t>
             </a:fld>
             <a:endParaRPr lang="ru-RU"/>
           </a:p>
@@ -6645,7 +6645,7 @@
             <a:fld id="{2B9B0CA2-EE7C-4F21-BC99-1B7BC45BB5BA}" type="datetimeFigureOut">
               <a:rPr lang="ru-RU" smtClean="0"/>
               <a:pPr/>
-              <a:t>29.05.2026</a:t>
+              <a:t>03.06.2026</a:t>
             </a:fld>
             <a:endParaRPr lang="ru-RU"/>
           </a:p>
@@ -10064,36 +10064,8 @@
               <a:rPr lang="ru-RU" dirty="0"/>
             </a:br>
             <a:r>
-              <a:rPr lang="ru-RU" b="1" dirty="0"/>
-              <a:t>Скриншоты:</a:t>
-            </a:r>
-            <a:r>
-              <a:rPr lang="ru-RU" dirty="0"/>
-              <a:t> Рисунок </a:t>
-            </a:r>
-            <a:r>
-              <a:rPr lang="ru-RU" dirty="0" smtClean="0"/>
-              <a:t>8, </a:t>
-            </a:r>
-            <a:r>
-              <a:rPr lang="ru-RU" dirty="0"/>
-              <a:t>Рисунок </a:t>
-            </a:r>
-            <a:r>
-              <a:rPr lang="ru-RU" dirty="0" smtClean="0"/>
-              <a:t>6</a:t>
-            </a:r>
-            <a:r>
-              <a:rPr lang="en-US" dirty="0" smtClean="0"/>
-              <a:t>, </a:t>
-            </a:r>
-            <a:r>
-              <a:rPr lang="ru-RU" dirty="0"/>
-              <a:t>Рисунок </a:t>
-            </a:r>
-            <a:r>
-              <a:rPr lang="ru-RU" dirty="0" smtClean="0"/>
-              <a:t>1.</a:t>
+              <a:rPr lang="ru-RU" b="1" dirty="0" smtClean="0"/>
+              <a:t>Рисунки:</a:t>
             </a:r>
             <a:endParaRPr lang="ru-RU" dirty="0"/>
           </a:p>
@@ -10177,24 +10149,30 @@
       </p:pic>
       <p:pic>
         <p:nvPicPr>
-          <p:cNvPr id="16" name="Рисунок 15"/>
-          <p:cNvPicPr/>
+          <p:cNvPr id="8" name="Google Shape;240;p21"/>
+          <p:cNvPicPr preferRelativeResize="0"/>
           <p:nvPr/>
         </p:nvPicPr>
         <p:blipFill>
-          <a:blip r:embed="rId4"/>
+          <a:blip r:embed="rId4">
+            <a:alphaModFix/>
+          </a:blip>
           <a:stretch>
             <a:fillRect/>
           </a:stretch>
         </p:blipFill>
         <p:spPr>
           <a:xfrm>
-            <a:off x="5778748" y="2628503"/>
-            <a:ext cx="5086662" cy="3584763"/>
+            <a:off x="5922764" y="2970252"/>
+            <a:ext cx="4770636" cy="3546683"/>
           </a:xfrm>
           <a:prstGeom prst="rect">
             <a:avLst/>
           </a:prstGeom>
+          <a:noFill/>
+          <a:ln>
+            <a:noFill/>
+          </a:ln>
         </p:spPr>
       </p:pic>
     </p:spTree>
